--- a/autumn/sem_5_pointers/presentations/Семинар_5.pptx
+++ b/autumn/sem_5_pointers/presentations/Семинар_5.pptx
@@ -11,10 +11,11 @@
     <p:sldId id="258" r:id="rId5"/>
     <p:sldId id="259" r:id="rId6"/>
     <p:sldId id="260" r:id="rId7"/>
-    <p:sldId id="261" r:id="rId8"/>
-    <p:sldId id="262" r:id="rId9"/>
-    <p:sldId id="263" r:id="rId10"/>
-    <p:sldId id="264" r:id="rId11"/>
+    <p:sldId id="266" r:id="rId8"/>
+    <p:sldId id="261" r:id="rId9"/>
+    <p:sldId id="262" r:id="rId10"/>
+    <p:sldId id="263" r:id="rId11"/>
+    <p:sldId id="264" r:id="rId12"/>
   </p:sldIdLst>
   <p:sldSz cx="12192000" cy="6858000"/>
   <p:notesSz cx="7772400" cy="10058400"/>
@@ -1550,6 +1551,457 @@
 </p:sld>
 </file>
 
+<file path=ppt/slides/slide10.xml><?xml version="1.0" encoding="utf-8"?>
+<p:sld xmlns:a="http://schemas.openxmlformats.org/drawingml/2006/main" xmlns:r="http://schemas.openxmlformats.org/officeDocument/2006/relationships" xmlns:p="http://schemas.openxmlformats.org/presentationml/2006/main">
+  <p:cSld>
+    <p:bg>
+      <p:bgPr>
+        <a:solidFill>
+          <a:srgbClr val="FFFFFF"/>
+        </a:solidFill>
+        <a:effectLst/>
+      </p:bgPr>
+    </p:bg>
+    <p:spTree>
+      <p:nvGrpSpPr>
+        <p:cNvPr id="1" name=""/>
+        <p:cNvGrpSpPr/>
+        <p:nvPr/>
+      </p:nvGrpSpPr>
+      <p:grpSpPr>
+        <a:xfrm>
+          <a:off x="0" y="0"/>
+          <a:ext cx="0" cy="0"/>
+          <a:chOff x="0" y="0"/>
+          <a:chExt cx="0" cy="0"/>
+        </a:xfrm>
+      </p:grpSpPr>
+      <p:sp>
+        <p:nvSpPr>
+          <p:cNvPr id="24" name="TextBox 23"/>
+          <p:cNvSpPr txBox="1"/>
+          <p:nvPr/>
+        </p:nvSpPr>
+        <p:spPr>
+          <a:xfrm>
+            <a:off x="838080" y="365040"/>
+            <a:ext cx="10515600" cy="1325520"/>
+          </a:xfrm>
+          <a:prstGeom prst="rect">
+            <a:avLst/>
+          </a:prstGeom>
+          <a:noFill/>
+          <a:ln w="0">
+            <a:noFill/>
+          </a:ln>
+        </p:spPr>
+        <p:txBody>
+          <a:bodyPr lIns="90000" tIns="45000" rIns="90000" bIns="45000" anchor="ctr">
+            <a:normAutofit/>
+          </a:bodyPr>
+          <a:lstStyle/>
+          <a:p>
+            <a:pPr>
+              <a:lnSpc>
+                <a:spcPct val="90000"/>
+              </a:lnSpc>
+            </a:pPr>
+            <a:r>
+              <a:rPr lang="en-US" sz="4400" b="0" strike="noStrike" spc="-1">
+                <a:solidFill>
+                  <a:srgbClr val="000000"/>
+                </a:solidFill>
+                <a:latin typeface="ArialMT"/>
+                <a:ea typeface="ArialMT"/>
+              </a:rPr>
+              <a:t>Указатели на функцию</a:t>
+            </a:r>
+            <a:endParaRPr lang="en-US" sz="4400" b="0" strike="noStrike" spc="-1">
+              <a:solidFill>
+                <a:srgbClr val="000000"/>
+              </a:solidFill>
+              <a:latin typeface="Arial"/>
+            </a:endParaRPr>
+          </a:p>
+        </p:txBody>
+      </p:sp>
+      <p:sp>
+        <p:nvSpPr>
+          <p:cNvPr id="25" name="TextBox 24"/>
+          <p:cNvSpPr txBox="1"/>
+          <p:nvPr/>
+        </p:nvSpPr>
+        <p:spPr>
+          <a:xfrm>
+            <a:off x="838080" y="1825560"/>
+            <a:ext cx="10515600" cy="4351320"/>
+          </a:xfrm>
+          <a:prstGeom prst="rect">
+            <a:avLst/>
+          </a:prstGeom>
+          <a:noFill/>
+          <a:ln w="0">
+            <a:noFill/>
+          </a:ln>
+        </p:spPr>
+        <p:txBody>
+          <a:bodyPr lIns="90000" tIns="45000" rIns="90000" bIns="45000" anchor="t">
+            <a:normAutofit/>
+          </a:bodyPr>
+          <a:lstStyle/>
+          <a:p>
+            <a:pPr marL="363600" indent="-363600">
+              <a:lnSpc>
+                <a:spcPct val="90000"/>
+              </a:lnSpc>
+              <a:spcBef>
+                <a:spcPts val="1001"/>
+              </a:spcBef>
+              <a:buClr>
+                <a:srgbClr val="000000"/>
+              </a:buClr>
+              <a:buSzPct val="45000"/>
+              <a:buFont typeface=""/>
+              <a:buChar char=""/>
+            </a:pPr>
+            <a:r>
+              <a:rPr lang="en-US" sz="2800" b="0" strike="noStrike" spc="-1" dirty="0" err="1">
+                <a:solidFill>
+                  <a:srgbClr val="000000"/>
+                </a:solidFill>
+                <a:latin typeface="ArialMT"/>
+                <a:ea typeface="ArialMT"/>
+              </a:rPr>
+              <a:t>Коварный</a:t>
+            </a:r>
+            <a:r>
+              <a:rPr lang="en-US" sz="2800" b="0" strike="noStrike" spc="-1" dirty="0">
+                <a:solidFill>
+                  <a:srgbClr val="000000"/>
+                </a:solidFill>
+                <a:latin typeface="ArialMT"/>
+                <a:ea typeface="ArialMT"/>
+              </a:rPr>
+              <a:t> </a:t>
+            </a:r>
+            <a:r>
+              <a:rPr lang="en-US" sz="2800" b="0" strike="noStrike" spc="-1" dirty="0" err="1">
+                <a:solidFill>
+                  <a:srgbClr val="000000"/>
+                </a:solidFill>
+                <a:latin typeface="ArialMT"/>
+                <a:ea typeface="ArialMT"/>
+              </a:rPr>
+              <a:t>синтаксис</a:t>
+            </a:r>
+            <a:r>
+              <a:rPr lang="en-US" sz="2800" b="0" strike="noStrike" spc="-1" dirty="0">
+                <a:solidFill>
+                  <a:srgbClr val="000000"/>
+                </a:solidFill>
+                <a:latin typeface="ArialMT"/>
+                <a:ea typeface="ArialMT"/>
+              </a:rPr>
+              <a:t>:</a:t>
+            </a:r>
+            <a:endParaRPr lang="en-US" sz="2800" b="0" strike="noStrike" spc="-1" dirty="0">
+              <a:solidFill>
+                <a:srgbClr val="000000"/>
+              </a:solidFill>
+              <a:latin typeface="Arial"/>
+            </a:endParaRPr>
+          </a:p>
+          <a:p>
+            <a:pPr>
+              <a:lnSpc>
+                <a:spcPct val="90000"/>
+              </a:lnSpc>
+              <a:spcBef>
+                <a:spcPts val="1001"/>
+              </a:spcBef>
+              <a:buClr>
+                <a:srgbClr val="000000"/>
+              </a:buClr>
+              <a:buSzPct val="45000"/>
+            </a:pPr>
+            <a:endParaRPr lang="en-US" sz="1800" b="0" strike="noStrike" spc="-1" dirty="0">
+              <a:solidFill>
+                <a:srgbClr val="000000"/>
+              </a:solidFill>
+              <a:latin typeface="Arial"/>
+            </a:endParaRPr>
+          </a:p>
+          <a:p>
+            <a:pPr>
+              <a:lnSpc>
+                <a:spcPct val="90000"/>
+              </a:lnSpc>
+              <a:spcBef>
+                <a:spcPts val="1001"/>
+              </a:spcBef>
+            </a:pPr>
+            <a:r>
+              <a:rPr lang="en-US" sz="2800" b="0" strike="noStrike" spc="-1" dirty="0" err="1">
+                <a:solidFill>
+                  <a:srgbClr val="000000"/>
+                </a:solidFill>
+                <a:latin typeface="Arial" panose="020B0604020202020204" pitchFamily="34" charset="0"/>
+                <a:ea typeface="ArialMT"/>
+                <a:cs typeface="Arial" panose="020B0604020202020204" pitchFamily="34" charset="0"/>
+              </a:rPr>
+              <a:t>return_type</a:t>
+            </a:r>
+            <a:r>
+              <a:rPr lang="en-US" sz="2800" b="0" strike="noStrike" spc="-1" dirty="0">
+                <a:solidFill>
+                  <a:srgbClr val="000000"/>
+                </a:solidFill>
+                <a:latin typeface="Arial" panose="020B0604020202020204" pitchFamily="34" charset="0"/>
+                <a:ea typeface="ArialMT"/>
+                <a:cs typeface="Arial" panose="020B0604020202020204" pitchFamily="34" charset="0"/>
+              </a:rPr>
+              <a:t> ( *</a:t>
+            </a:r>
+            <a:r>
+              <a:rPr lang="en-US" sz="2800" b="0" strike="noStrike" spc="-1" dirty="0" err="1">
+                <a:solidFill>
+                  <a:srgbClr val="000000"/>
+                </a:solidFill>
+                <a:latin typeface="Arial" panose="020B0604020202020204" pitchFamily="34" charset="0"/>
+                <a:ea typeface="ArialMT"/>
+                <a:cs typeface="Arial" panose="020B0604020202020204" pitchFamily="34" charset="0"/>
+              </a:rPr>
+              <a:t>variable_name</a:t>
+            </a:r>
+            <a:r>
+              <a:rPr lang="en-US" sz="2800" b="0" strike="noStrike" spc="-1" dirty="0">
+                <a:solidFill>
+                  <a:srgbClr val="000000"/>
+                </a:solidFill>
+                <a:latin typeface="Arial" panose="020B0604020202020204" pitchFamily="34" charset="0"/>
+                <a:ea typeface="ArialMT"/>
+                <a:cs typeface="Arial" panose="020B0604020202020204" pitchFamily="34" charset="0"/>
+              </a:rPr>
+              <a:t>)( </a:t>
+            </a:r>
+            <a:r>
+              <a:rPr lang="en-US" sz="2800" b="0" strike="noStrike" spc="-1" dirty="0" err="1">
+                <a:solidFill>
+                  <a:srgbClr val="000000"/>
+                </a:solidFill>
+                <a:latin typeface="Arial" panose="020B0604020202020204" pitchFamily="34" charset="0"/>
+                <a:ea typeface="ArialMT"/>
+                <a:cs typeface="Arial" panose="020B0604020202020204" pitchFamily="34" charset="0"/>
+              </a:rPr>
+              <a:t>args</a:t>
+            </a:r>
+            <a:r>
+              <a:rPr lang="en-US" sz="2800" b="0" strike="noStrike" spc="-1" dirty="0">
+                <a:solidFill>
+                  <a:srgbClr val="000000"/>
+                </a:solidFill>
+                <a:latin typeface="Arial" panose="020B0604020202020204" pitchFamily="34" charset="0"/>
+                <a:ea typeface="ArialMT"/>
+                <a:cs typeface="Arial" panose="020B0604020202020204" pitchFamily="34" charset="0"/>
+              </a:rPr>
+              <a:t>, ...)</a:t>
+            </a:r>
+            <a:endParaRPr lang="en-US" sz="2800" spc="-1" dirty="0">
+              <a:solidFill>
+                <a:srgbClr val="000000"/>
+              </a:solidFill>
+              <a:latin typeface="Arial" panose="020B0604020202020204" pitchFamily="34" charset="0"/>
+              <a:cs typeface="Arial" panose="020B0604020202020204" pitchFamily="34" charset="0"/>
+            </a:endParaRPr>
+          </a:p>
+          <a:p>
+            <a:pPr>
+              <a:lnSpc>
+                <a:spcPct val="90000"/>
+              </a:lnSpc>
+              <a:spcBef>
+                <a:spcPts val="1001"/>
+              </a:spcBef>
+            </a:pPr>
+            <a:r>
+              <a:rPr lang="en-US" sz="2800" spc="-1" dirty="0">
+                <a:solidFill>
+                  <a:srgbClr val="000000"/>
+                </a:solidFill>
+                <a:latin typeface="Arial" panose="020B0604020202020204" pitchFamily="34" charset="0"/>
+                <a:ea typeface="ArialMT"/>
+                <a:cs typeface="Arial" panose="020B0604020202020204" pitchFamily="34" charset="0"/>
+              </a:rPr>
+              <a:t>i</a:t>
+            </a:r>
+            <a:r>
+              <a:rPr lang="en-US" sz="2800" b="0" strike="noStrike" spc="-1" dirty="0">
+                <a:solidFill>
+                  <a:srgbClr val="000000"/>
+                </a:solidFill>
+                <a:latin typeface="Arial" panose="020B0604020202020204" pitchFamily="34" charset="0"/>
+                <a:ea typeface="ArialMT"/>
+                <a:cs typeface="Arial" panose="020B0604020202020204" pitchFamily="34" charset="0"/>
+              </a:rPr>
+              <a:t>nt (*</a:t>
+            </a:r>
+            <a:r>
+              <a:rPr lang="en-US" sz="2800" b="0" strike="noStrike" spc="-1" dirty="0" err="1">
+                <a:solidFill>
+                  <a:srgbClr val="000000"/>
+                </a:solidFill>
+                <a:latin typeface="Arial" panose="020B0604020202020204" pitchFamily="34" charset="0"/>
+                <a:ea typeface="ArialMT"/>
+                <a:cs typeface="Arial" panose="020B0604020202020204" pitchFamily="34" charset="0"/>
+              </a:rPr>
+              <a:t>func_ptr</a:t>
+            </a:r>
+            <a:r>
+              <a:rPr lang="en-US" sz="2800" b="0" strike="noStrike" spc="-1" dirty="0">
+                <a:solidFill>
+                  <a:srgbClr val="000000"/>
+                </a:solidFill>
+                <a:latin typeface="Arial" panose="020B0604020202020204" pitchFamily="34" charset="0"/>
+                <a:ea typeface="ArialMT"/>
+                <a:cs typeface="Arial" panose="020B0604020202020204" pitchFamily="34" charset="0"/>
+              </a:rPr>
+              <a:t>)( double </a:t>
+            </a:r>
+            <a:r>
+              <a:rPr lang="en-US" sz="2800" b="0" strike="noStrike" spc="-1" dirty="0" err="1">
+                <a:solidFill>
+                  <a:srgbClr val="000000"/>
+                </a:solidFill>
+                <a:latin typeface="Arial" panose="020B0604020202020204" pitchFamily="34" charset="0"/>
+                <a:ea typeface="ArialMT"/>
+                <a:cs typeface="Arial" panose="020B0604020202020204" pitchFamily="34" charset="0"/>
+              </a:rPr>
+              <a:t>first_val</a:t>
+            </a:r>
+            <a:r>
+              <a:rPr lang="en-US" sz="2800" b="0" strike="noStrike" spc="-1" dirty="0">
+                <a:solidFill>
+                  <a:srgbClr val="000000"/>
+                </a:solidFill>
+                <a:latin typeface="Arial" panose="020B0604020202020204" pitchFamily="34" charset="0"/>
+                <a:ea typeface="ArialMT"/>
+                <a:cs typeface="Arial" panose="020B0604020202020204" pitchFamily="34" charset="0"/>
+              </a:rPr>
+              <a:t>, int </a:t>
+            </a:r>
+            <a:r>
+              <a:rPr lang="en-US" sz="2800" b="0" strike="noStrike" spc="-1" dirty="0" err="1">
+                <a:solidFill>
+                  <a:srgbClr val="000000"/>
+                </a:solidFill>
+                <a:latin typeface="Arial" panose="020B0604020202020204" pitchFamily="34" charset="0"/>
+                <a:ea typeface="ArialMT"/>
+                <a:cs typeface="Arial" panose="020B0604020202020204" pitchFamily="34" charset="0"/>
+              </a:rPr>
+              <a:t>second_val</a:t>
+            </a:r>
+            <a:r>
+              <a:rPr lang="en-US" sz="2800" b="0" strike="noStrike" spc="-1" dirty="0">
+                <a:solidFill>
+                  <a:srgbClr val="000000"/>
+                </a:solidFill>
+                <a:latin typeface="Arial" panose="020B0604020202020204" pitchFamily="34" charset="0"/>
+                <a:ea typeface="ArialMT"/>
+                <a:cs typeface="Arial" panose="020B0604020202020204" pitchFamily="34" charset="0"/>
+              </a:rPr>
+              <a:t>);</a:t>
+            </a:r>
+            <a:endParaRPr lang="en-US" sz="2800" spc="-1" dirty="0">
+              <a:solidFill>
+                <a:srgbClr val="000000"/>
+              </a:solidFill>
+              <a:latin typeface="Arial" panose="020B0604020202020204" pitchFamily="34" charset="0"/>
+              <a:ea typeface="ArialMT"/>
+              <a:cs typeface="Arial" panose="020B0604020202020204" pitchFamily="34" charset="0"/>
+            </a:endParaRPr>
+          </a:p>
+          <a:p>
+            <a:pPr>
+              <a:lnSpc>
+                <a:spcPct val="90000"/>
+              </a:lnSpc>
+              <a:spcBef>
+                <a:spcPts val="1001"/>
+              </a:spcBef>
+            </a:pPr>
+            <a:r>
+              <a:rPr lang="en-US" sz="2800" b="0" strike="noStrike" spc="-1" dirty="0" err="1">
+                <a:solidFill>
+                  <a:srgbClr val="000000"/>
+                </a:solidFill>
+                <a:latin typeface="Arial" panose="020B0604020202020204" pitchFamily="34" charset="0"/>
+                <a:cs typeface="Arial" panose="020B0604020202020204" pitchFamily="34" charset="0"/>
+                <a:hlinkClick r:id="rId2"/>
+              </a:rPr>
+              <a:t>Посмотреть</a:t>
+            </a:r>
+            <a:r>
+              <a:rPr lang="en-US" sz="2800" b="0" strike="noStrike" spc="-1" dirty="0">
+                <a:solidFill>
+                  <a:srgbClr val="000000"/>
+                </a:solidFill>
+                <a:latin typeface="Arial" panose="020B0604020202020204" pitchFamily="34" charset="0"/>
+                <a:cs typeface="Arial" panose="020B0604020202020204" pitchFamily="34" charset="0"/>
+                <a:hlinkClick r:id="rId2"/>
+              </a:rPr>
+              <a:t> </a:t>
+            </a:r>
+            <a:r>
+              <a:rPr lang="en-US" sz="2800" b="0" strike="noStrike" spc="-1" dirty="0" err="1">
+                <a:solidFill>
+                  <a:srgbClr val="000000"/>
+                </a:solidFill>
+                <a:latin typeface="Arial" panose="020B0604020202020204" pitchFamily="34" charset="0"/>
+                <a:cs typeface="Arial" panose="020B0604020202020204" pitchFamily="34" charset="0"/>
+                <a:hlinkClick r:id="rId2"/>
+              </a:rPr>
+              <a:t>можно</a:t>
+            </a:r>
+            <a:r>
+              <a:rPr lang="en-US" sz="2800" b="0" strike="noStrike" spc="-1" dirty="0">
+                <a:solidFill>
+                  <a:srgbClr val="000000"/>
+                </a:solidFill>
+                <a:latin typeface="Arial" panose="020B0604020202020204" pitchFamily="34" charset="0"/>
+                <a:cs typeface="Arial" panose="020B0604020202020204" pitchFamily="34" charset="0"/>
+                <a:hlinkClick r:id="rId2"/>
+              </a:rPr>
+              <a:t> </a:t>
+            </a:r>
+            <a:r>
+              <a:rPr lang="en-US" sz="2800" b="0" strike="noStrike" spc="-1" dirty="0" err="1">
+                <a:solidFill>
+                  <a:srgbClr val="000000"/>
+                </a:solidFill>
+                <a:latin typeface="Arial" panose="020B0604020202020204" pitchFamily="34" charset="0"/>
+                <a:cs typeface="Arial" panose="020B0604020202020204" pitchFamily="34" charset="0"/>
+                <a:hlinkClick r:id="rId2"/>
+              </a:rPr>
+              <a:t>тут</a:t>
+            </a:r>
+            <a:endParaRPr lang="en-US" sz="2800" b="0" strike="noStrike" spc="-1" dirty="0">
+              <a:solidFill>
+                <a:srgbClr val="000000"/>
+              </a:solidFill>
+              <a:latin typeface="Arial" panose="020B0604020202020204" pitchFamily="34" charset="0"/>
+              <a:cs typeface="Arial" panose="020B0604020202020204" pitchFamily="34" charset="0"/>
+            </a:endParaRPr>
+          </a:p>
+        </p:txBody>
+      </p:sp>
+    </p:spTree>
+  </p:cSld>
+  <p:clrMapOvr>
+    <a:masterClrMapping/>
+  </p:clrMapOvr>
+</p:sld>
+</file>
+
 <file path=ppt/slides/slide2.xml><?xml version="1.0" encoding="utf-8"?>
 <p:sld xmlns:a="http://schemas.openxmlformats.org/drawingml/2006/main" xmlns:r="http://schemas.openxmlformats.org/officeDocument/2006/relationships" xmlns:p="http://schemas.openxmlformats.org/presentationml/2006/main">
   <p:cSld>
@@ -3212,6 +3664,191 @@
 <file path=ppt/slides/slide6.xml><?xml version="1.0" encoding="utf-8"?>
 <p:sld xmlns:a="http://schemas.openxmlformats.org/drawingml/2006/main" xmlns:r="http://schemas.openxmlformats.org/officeDocument/2006/relationships" xmlns:p="http://schemas.openxmlformats.org/presentationml/2006/main">
   <p:cSld>
+    <p:spTree>
+      <p:nvGrpSpPr>
+        <p:cNvPr id="1" name=""/>
+        <p:cNvGrpSpPr/>
+        <p:nvPr/>
+      </p:nvGrpSpPr>
+      <p:grpSpPr>
+        <a:xfrm>
+          <a:off x="0" y="0"/>
+          <a:ext cx="0" cy="0"/>
+          <a:chOff x="0" y="0"/>
+          <a:chExt cx="0" cy="0"/>
+        </a:xfrm>
+      </p:grpSpPr>
+      <p:sp>
+        <p:nvSpPr>
+          <p:cNvPr id="16" name="TextBox 15"/>
+          <p:cNvSpPr txBox="1"/>
+          <p:nvPr/>
+        </p:nvSpPr>
+        <p:spPr>
+          <a:xfrm>
+            <a:off x="838079" y="365040"/>
+            <a:ext cx="11131313" cy="1325520"/>
+          </a:xfrm>
+          <a:prstGeom prst="rect">
+            <a:avLst/>
+          </a:prstGeom>
+          <a:noFill/>
+          <a:ln w="0">
+            <a:noFill/>
+          </a:ln>
+        </p:spPr>
+        <p:txBody>
+          <a:bodyPr lIns="90000" tIns="45000" rIns="90000" bIns="45000" anchor="ctr">
+            <a:normAutofit/>
+          </a:bodyPr>
+          <a:lstStyle/>
+          <a:p>
+            <a:pPr>
+              <a:lnSpc>
+                <a:spcPct val="90000"/>
+              </a:lnSpc>
+            </a:pPr>
+            <a:r>
+              <a:rPr lang="ru-RU" sz="4400" b="0" strike="noStrike" spc="-1" dirty="0">
+                <a:solidFill>
+                  <a:srgbClr val="000000"/>
+                </a:solidFill>
+                <a:latin typeface="Arial"/>
+              </a:rPr>
+              <a:t>Передача массивов в качестве аргументов функции</a:t>
+            </a:r>
+            <a:endParaRPr lang="en-US" sz="4400" b="0" strike="noStrike" spc="-1" dirty="0">
+              <a:solidFill>
+                <a:srgbClr val="000000"/>
+              </a:solidFill>
+              <a:latin typeface="Arial"/>
+            </a:endParaRPr>
+          </a:p>
+        </p:txBody>
+      </p:sp>
+      <p:sp>
+        <p:nvSpPr>
+          <p:cNvPr id="17" name="TextBox 16"/>
+          <p:cNvSpPr txBox="1"/>
+          <p:nvPr/>
+        </p:nvSpPr>
+        <p:spPr>
+          <a:xfrm>
+            <a:off x="838080" y="2193011"/>
+            <a:ext cx="10515600" cy="4351320"/>
+          </a:xfrm>
+          <a:prstGeom prst="rect">
+            <a:avLst/>
+          </a:prstGeom>
+          <a:noFill/>
+          <a:ln w="0">
+            <a:noFill/>
+          </a:ln>
+        </p:spPr>
+        <p:txBody>
+          <a:bodyPr lIns="90000" tIns="45000" rIns="90000" bIns="45000" anchor="t">
+            <a:normAutofit/>
+          </a:bodyPr>
+          <a:lstStyle/>
+          <a:p>
+            <a:pPr marL="514350" indent="-514350">
+              <a:lnSpc>
+                <a:spcPct val="90000"/>
+              </a:lnSpc>
+              <a:spcBef>
+                <a:spcPts val="1001"/>
+              </a:spcBef>
+              <a:buClr>
+                <a:srgbClr val="000000"/>
+              </a:buClr>
+              <a:buSzPct val="45000"/>
+              <a:buFont typeface="+mj-lt"/>
+              <a:buAutoNum type="arabicPeriod"/>
+            </a:pPr>
+            <a:r>
+              <a:rPr lang="ru-RU" sz="2800" spc="-1" dirty="0">
+                <a:solidFill>
+                  <a:srgbClr val="000000"/>
+                </a:solidFill>
+                <a:latin typeface="Arial"/>
+              </a:rPr>
+              <a:t>При передаче в функцию массив неявно преобразуется в указатель на первый элемент</a:t>
+            </a:r>
+          </a:p>
+          <a:p>
+            <a:pPr marL="514350" indent="-514350">
+              <a:lnSpc>
+                <a:spcPct val="90000"/>
+              </a:lnSpc>
+              <a:spcBef>
+                <a:spcPts val="1001"/>
+              </a:spcBef>
+              <a:buClr>
+                <a:srgbClr val="000000"/>
+              </a:buClr>
+              <a:buSzPct val="45000"/>
+              <a:buFont typeface="+mj-lt"/>
+              <a:buAutoNum type="arabicPeriod"/>
+            </a:pPr>
+            <a:r>
+              <a:rPr lang="ru-RU" sz="2800" b="0" strike="noStrike" spc="-1" dirty="0">
+                <a:solidFill>
+                  <a:srgbClr val="000000"/>
+                </a:solidFill>
+                <a:latin typeface="Arial"/>
+              </a:rPr>
+              <a:t>Даже если явно указать аргумент как массив некоторого размера, то компилятор проигнорирует этот размер</a:t>
+            </a:r>
+          </a:p>
+          <a:p>
+            <a:pPr marL="514350" indent="-514350">
+              <a:lnSpc>
+                <a:spcPct val="90000"/>
+              </a:lnSpc>
+              <a:spcBef>
+                <a:spcPts val="1001"/>
+              </a:spcBef>
+              <a:buClr>
+                <a:srgbClr val="000000"/>
+              </a:buClr>
+              <a:buSzPct val="45000"/>
+              <a:buFont typeface="+mj-lt"/>
+              <a:buAutoNum type="arabicPeriod"/>
+            </a:pPr>
+            <a:r>
+              <a:rPr lang="ru-RU" sz="2800" spc="-1" dirty="0">
+                <a:solidFill>
+                  <a:srgbClr val="000000"/>
+                </a:solidFill>
+                <a:latin typeface="Arial"/>
+              </a:rPr>
+              <a:t>При передаче двумерных массивов компилятор должен знать вторую размерность, чтобы правильно вычислять смещение</a:t>
+            </a:r>
+            <a:endParaRPr lang="en-US" sz="2800" b="0" strike="noStrike" spc="-1" dirty="0">
+              <a:solidFill>
+                <a:srgbClr val="000000"/>
+              </a:solidFill>
+              <a:latin typeface="Arial"/>
+            </a:endParaRPr>
+          </a:p>
+        </p:txBody>
+      </p:sp>
+    </p:spTree>
+    <p:extLst>
+      <p:ext uri="{BB962C8B-B14F-4D97-AF65-F5344CB8AC3E}">
+        <p14:creationId xmlns:p14="http://schemas.microsoft.com/office/powerpoint/2010/main" val="796210426"/>
+      </p:ext>
+    </p:extLst>
+  </p:cSld>
+  <p:clrMapOvr>
+    <a:masterClrMapping/>
+  </p:clrMapOvr>
+</p:sld>
+</file>
+
+<file path=ppt/slides/slide7.xml><?xml version="1.0" encoding="utf-8"?>
+<p:sld xmlns:a="http://schemas.openxmlformats.org/drawingml/2006/main" xmlns:r="http://schemas.openxmlformats.org/officeDocument/2006/relationships" xmlns:p="http://schemas.openxmlformats.org/presentationml/2006/main">
+  <p:cSld>
     <p:bg>
       <p:bgPr>
         <a:solidFill>
@@ -3582,7 +4219,7 @@
 </p:sld>
 </file>
 
-<file path=ppt/slides/slide7.xml><?xml version="1.0" encoding="utf-8"?>
+<file path=ppt/slides/slide8.xml><?xml version="1.0" encoding="utf-8"?>
 <p:sld xmlns:a="http://schemas.openxmlformats.org/drawingml/2006/main" xmlns:r="http://schemas.openxmlformats.org/officeDocument/2006/relationships" xmlns:p="http://schemas.openxmlformats.org/presentationml/2006/main">
   <p:cSld>
     <p:bg>
@@ -3922,7 +4559,7 @@
 </p:sld>
 </file>
 
-<file path=ppt/slides/slide8.xml><?xml version="1.0" encoding="utf-8"?>
+<file path=ppt/slides/slide9.xml><?xml version="1.0" encoding="utf-8"?>
 <p:sld xmlns:a="http://schemas.openxmlformats.org/drawingml/2006/main" xmlns:r="http://schemas.openxmlformats.org/officeDocument/2006/relationships" xmlns:p="http://schemas.openxmlformats.org/presentationml/2006/main">
   <p:cSld>
     <p:bg>
@@ -4574,457 +5211,6 @@
                 <a:cs typeface="Arial" panose="020B0604020202020204" pitchFamily="34" charset="0"/>
               </a:rPr>
               <a:t>$ echo $?</a:t>
-            </a:r>
-            <a:endParaRPr lang="en-US" sz="2800" b="0" strike="noStrike" spc="-1" dirty="0">
-              <a:solidFill>
-                <a:srgbClr val="000000"/>
-              </a:solidFill>
-              <a:latin typeface="Arial" panose="020B0604020202020204" pitchFamily="34" charset="0"/>
-              <a:cs typeface="Arial" panose="020B0604020202020204" pitchFamily="34" charset="0"/>
-            </a:endParaRPr>
-          </a:p>
-        </p:txBody>
-      </p:sp>
-    </p:spTree>
-  </p:cSld>
-  <p:clrMapOvr>
-    <a:masterClrMapping/>
-  </p:clrMapOvr>
-</p:sld>
-</file>
-
-<file path=ppt/slides/slide9.xml><?xml version="1.0" encoding="utf-8"?>
-<p:sld xmlns:a="http://schemas.openxmlformats.org/drawingml/2006/main" xmlns:r="http://schemas.openxmlformats.org/officeDocument/2006/relationships" xmlns:p="http://schemas.openxmlformats.org/presentationml/2006/main">
-  <p:cSld>
-    <p:bg>
-      <p:bgPr>
-        <a:solidFill>
-          <a:srgbClr val="FFFFFF"/>
-        </a:solidFill>
-        <a:effectLst/>
-      </p:bgPr>
-    </p:bg>
-    <p:spTree>
-      <p:nvGrpSpPr>
-        <p:cNvPr id="1" name=""/>
-        <p:cNvGrpSpPr/>
-        <p:nvPr/>
-      </p:nvGrpSpPr>
-      <p:grpSpPr>
-        <a:xfrm>
-          <a:off x="0" y="0"/>
-          <a:ext cx="0" cy="0"/>
-          <a:chOff x="0" y="0"/>
-          <a:chExt cx="0" cy="0"/>
-        </a:xfrm>
-      </p:grpSpPr>
-      <p:sp>
-        <p:nvSpPr>
-          <p:cNvPr id="24" name="TextBox 23"/>
-          <p:cNvSpPr txBox="1"/>
-          <p:nvPr/>
-        </p:nvSpPr>
-        <p:spPr>
-          <a:xfrm>
-            <a:off x="838080" y="365040"/>
-            <a:ext cx="10515600" cy="1325520"/>
-          </a:xfrm>
-          <a:prstGeom prst="rect">
-            <a:avLst/>
-          </a:prstGeom>
-          <a:noFill/>
-          <a:ln w="0">
-            <a:noFill/>
-          </a:ln>
-        </p:spPr>
-        <p:txBody>
-          <a:bodyPr lIns="90000" tIns="45000" rIns="90000" bIns="45000" anchor="ctr">
-            <a:normAutofit/>
-          </a:bodyPr>
-          <a:lstStyle/>
-          <a:p>
-            <a:pPr>
-              <a:lnSpc>
-                <a:spcPct val="90000"/>
-              </a:lnSpc>
-            </a:pPr>
-            <a:r>
-              <a:rPr lang="en-US" sz="4400" b="0" strike="noStrike" spc="-1">
-                <a:solidFill>
-                  <a:srgbClr val="000000"/>
-                </a:solidFill>
-                <a:latin typeface="ArialMT"/>
-                <a:ea typeface="ArialMT"/>
-              </a:rPr>
-              <a:t>Указатели на функцию</a:t>
-            </a:r>
-            <a:endParaRPr lang="en-US" sz="4400" b="0" strike="noStrike" spc="-1">
-              <a:solidFill>
-                <a:srgbClr val="000000"/>
-              </a:solidFill>
-              <a:latin typeface="Arial"/>
-            </a:endParaRPr>
-          </a:p>
-        </p:txBody>
-      </p:sp>
-      <p:sp>
-        <p:nvSpPr>
-          <p:cNvPr id="25" name="TextBox 24"/>
-          <p:cNvSpPr txBox="1"/>
-          <p:nvPr/>
-        </p:nvSpPr>
-        <p:spPr>
-          <a:xfrm>
-            <a:off x="838080" y="1825560"/>
-            <a:ext cx="10515600" cy="4351320"/>
-          </a:xfrm>
-          <a:prstGeom prst="rect">
-            <a:avLst/>
-          </a:prstGeom>
-          <a:noFill/>
-          <a:ln w="0">
-            <a:noFill/>
-          </a:ln>
-        </p:spPr>
-        <p:txBody>
-          <a:bodyPr lIns="90000" tIns="45000" rIns="90000" bIns="45000" anchor="t">
-            <a:normAutofit/>
-          </a:bodyPr>
-          <a:lstStyle/>
-          <a:p>
-            <a:pPr marL="363600" indent="-363600">
-              <a:lnSpc>
-                <a:spcPct val="90000"/>
-              </a:lnSpc>
-              <a:spcBef>
-                <a:spcPts val="1001"/>
-              </a:spcBef>
-              <a:buClr>
-                <a:srgbClr val="000000"/>
-              </a:buClr>
-              <a:buSzPct val="45000"/>
-              <a:buFont typeface=""/>
-              <a:buChar char=""/>
-            </a:pPr>
-            <a:r>
-              <a:rPr lang="en-US" sz="2800" b="0" strike="noStrike" spc="-1" dirty="0" err="1">
-                <a:solidFill>
-                  <a:srgbClr val="000000"/>
-                </a:solidFill>
-                <a:latin typeface="ArialMT"/>
-                <a:ea typeface="ArialMT"/>
-              </a:rPr>
-              <a:t>Коварный</a:t>
-            </a:r>
-            <a:r>
-              <a:rPr lang="en-US" sz="2800" b="0" strike="noStrike" spc="-1" dirty="0">
-                <a:solidFill>
-                  <a:srgbClr val="000000"/>
-                </a:solidFill>
-                <a:latin typeface="ArialMT"/>
-                <a:ea typeface="ArialMT"/>
-              </a:rPr>
-              <a:t> </a:t>
-            </a:r>
-            <a:r>
-              <a:rPr lang="en-US" sz="2800" b="0" strike="noStrike" spc="-1" dirty="0" err="1">
-                <a:solidFill>
-                  <a:srgbClr val="000000"/>
-                </a:solidFill>
-                <a:latin typeface="ArialMT"/>
-                <a:ea typeface="ArialMT"/>
-              </a:rPr>
-              <a:t>синтаксис</a:t>
-            </a:r>
-            <a:r>
-              <a:rPr lang="en-US" sz="2800" b="0" strike="noStrike" spc="-1" dirty="0">
-                <a:solidFill>
-                  <a:srgbClr val="000000"/>
-                </a:solidFill>
-                <a:latin typeface="ArialMT"/>
-                <a:ea typeface="ArialMT"/>
-              </a:rPr>
-              <a:t>:</a:t>
-            </a:r>
-            <a:endParaRPr lang="en-US" sz="2800" b="0" strike="noStrike" spc="-1" dirty="0">
-              <a:solidFill>
-                <a:srgbClr val="000000"/>
-              </a:solidFill>
-              <a:latin typeface="Arial"/>
-            </a:endParaRPr>
-          </a:p>
-          <a:p>
-            <a:pPr>
-              <a:lnSpc>
-                <a:spcPct val="90000"/>
-              </a:lnSpc>
-              <a:spcBef>
-                <a:spcPts val="1001"/>
-              </a:spcBef>
-              <a:buClr>
-                <a:srgbClr val="000000"/>
-              </a:buClr>
-              <a:buSzPct val="45000"/>
-            </a:pPr>
-            <a:endParaRPr lang="en-US" sz="1800" b="0" strike="noStrike" spc="-1" dirty="0">
-              <a:solidFill>
-                <a:srgbClr val="000000"/>
-              </a:solidFill>
-              <a:latin typeface="Arial"/>
-            </a:endParaRPr>
-          </a:p>
-          <a:p>
-            <a:pPr>
-              <a:lnSpc>
-                <a:spcPct val="90000"/>
-              </a:lnSpc>
-              <a:spcBef>
-                <a:spcPts val="1001"/>
-              </a:spcBef>
-            </a:pPr>
-            <a:r>
-              <a:rPr lang="en-US" sz="2800" b="0" strike="noStrike" spc="-1" dirty="0" err="1">
-                <a:solidFill>
-                  <a:srgbClr val="000000"/>
-                </a:solidFill>
-                <a:latin typeface="Arial" panose="020B0604020202020204" pitchFamily="34" charset="0"/>
-                <a:ea typeface="ArialMT"/>
-                <a:cs typeface="Arial" panose="020B0604020202020204" pitchFamily="34" charset="0"/>
-              </a:rPr>
-              <a:t>return_type</a:t>
-            </a:r>
-            <a:r>
-              <a:rPr lang="en-US" sz="2800" b="0" strike="noStrike" spc="-1" dirty="0">
-                <a:solidFill>
-                  <a:srgbClr val="000000"/>
-                </a:solidFill>
-                <a:latin typeface="Arial" panose="020B0604020202020204" pitchFamily="34" charset="0"/>
-                <a:ea typeface="ArialMT"/>
-                <a:cs typeface="Arial" panose="020B0604020202020204" pitchFamily="34" charset="0"/>
-              </a:rPr>
-              <a:t> ( *</a:t>
-            </a:r>
-            <a:r>
-              <a:rPr lang="en-US" sz="2800" b="0" strike="noStrike" spc="-1" dirty="0" err="1">
-                <a:solidFill>
-                  <a:srgbClr val="000000"/>
-                </a:solidFill>
-                <a:latin typeface="Arial" panose="020B0604020202020204" pitchFamily="34" charset="0"/>
-                <a:ea typeface="ArialMT"/>
-                <a:cs typeface="Arial" panose="020B0604020202020204" pitchFamily="34" charset="0"/>
-              </a:rPr>
-              <a:t>variable_name</a:t>
-            </a:r>
-            <a:r>
-              <a:rPr lang="en-US" sz="2800" b="0" strike="noStrike" spc="-1" dirty="0">
-                <a:solidFill>
-                  <a:srgbClr val="000000"/>
-                </a:solidFill>
-                <a:latin typeface="Arial" panose="020B0604020202020204" pitchFamily="34" charset="0"/>
-                <a:ea typeface="ArialMT"/>
-                <a:cs typeface="Arial" panose="020B0604020202020204" pitchFamily="34" charset="0"/>
-              </a:rPr>
-              <a:t>)( </a:t>
-            </a:r>
-            <a:r>
-              <a:rPr lang="en-US" sz="2800" b="0" strike="noStrike" spc="-1" dirty="0" err="1">
-                <a:solidFill>
-                  <a:srgbClr val="000000"/>
-                </a:solidFill>
-                <a:latin typeface="Arial" panose="020B0604020202020204" pitchFamily="34" charset="0"/>
-                <a:ea typeface="ArialMT"/>
-                <a:cs typeface="Arial" panose="020B0604020202020204" pitchFamily="34" charset="0"/>
-              </a:rPr>
-              <a:t>args</a:t>
-            </a:r>
-            <a:r>
-              <a:rPr lang="en-US" sz="2800" b="0" strike="noStrike" spc="-1" dirty="0">
-                <a:solidFill>
-                  <a:srgbClr val="000000"/>
-                </a:solidFill>
-                <a:latin typeface="Arial" panose="020B0604020202020204" pitchFamily="34" charset="0"/>
-                <a:ea typeface="ArialMT"/>
-                <a:cs typeface="Arial" panose="020B0604020202020204" pitchFamily="34" charset="0"/>
-              </a:rPr>
-              <a:t>, ...)</a:t>
-            </a:r>
-            <a:endParaRPr lang="en-US" sz="2800" spc="-1" dirty="0">
-              <a:solidFill>
-                <a:srgbClr val="000000"/>
-              </a:solidFill>
-              <a:latin typeface="Arial" panose="020B0604020202020204" pitchFamily="34" charset="0"/>
-              <a:cs typeface="Arial" panose="020B0604020202020204" pitchFamily="34" charset="0"/>
-            </a:endParaRPr>
-          </a:p>
-          <a:p>
-            <a:pPr>
-              <a:lnSpc>
-                <a:spcPct val="90000"/>
-              </a:lnSpc>
-              <a:spcBef>
-                <a:spcPts val="1001"/>
-              </a:spcBef>
-            </a:pPr>
-            <a:r>
-              <a:rPr lang="en-US" sz="2800" spc="-1" dirty="0">
-                <a:solidFill>
-                  <a:srgbClr val="000000"/>
-                </a:solidFill>
-                <a:latin typeface="Arial" panose="020B0604020202020204" pitchFamily="34" charset="0"/>
-                <a:ea typeface="ArialMT"/>
-                <a:cs typeface="Arial" panose="020B0604020202020204" pitchFamily="34" charset="0"/>
-              </a:rPr>
-              <a:t>i</a:t>
-            </a:r>
-            <a:r>
-              <a:rPr lang="en-US" sz="2800" b="0" strike="noStrike" spc="-1" dirty="0">
-                <a:solidFill>
-                  <a:srgbClr val="000000"/>
-                </a:solidFill>
-                <a:latin typeface="Arial" panose="020B0604020202020204" pitchFamily="34" charset="0"/>
-                <a:ea typeface="ArialMT"/>
-                <a:cs typeface="Arial" panose="020B0604020202020204" pitchFamily="34" charset="0"/>
-              </a:rPr>
-              <a:t>nt (*</a:t>
-            </a:r>
-            <a:r>
-              <a:rPr lang="en-US" sz="2800" b="0" strike="noStrike" spc="-1" dirty="0" err="1">
-                <a:solidFill>
-                  <a:srgbClr val="000000"/>
-                </a:solidFill>
-                <a:latin typeface="Arial" panose="020B0604020202020204" pitchFamily="34" charset="0"/>
-                <a:ea typeface="ArialMT"/>
-                <a:cs typeface="Arial" panose="020B0604020202020204" pitchFamily="34" charset="0"/>
-              </a:rPr>
-              <a:t>func_ptr</a:t>
-            </a:r>
-            <a:r>
-              <a:rPr lang="en-US" sz="2800" b="0" strike="noStrike" spc="-1" dirty="0">
-                <a:solidFill>
-                  <a:srgbClr val="000000"/>
-                </a:solidFill>
-                <a:latin typeface="Arial" panose="020B0604020202020204" pitchFamily="34" charset="0"/>
-                <a:ea typeface="ArialMT"/>
-                <a:cs typeface="Arial" panose="020B0604020202020204" pitchFamily="34" charset="0"/>
-              </a:rPr>
-              <a:t>)( double </a:t>
-            </a:r>
-            <a:r>
-              <a:rPr lang="en-US" sz="2800" b="0" strike="noStrike" spc="-1" dirty="0" err="1">
-                <a:solidFill>
-                  <a:srgbClr val="000000"/>
-                </a:solidFill>
-                <a:latin typeface="Arial" panose="020B0604020202020204" pitchFamily="34" charset="0"/>
-                <a:ea typeface="ArialMT"/>
-                <a:cs typeface="Arial" panose="020B0604020202020204" pitchFamily="34" charset="0"/>
-              </a:rPr>
-              <a:t>first_val</a:t>
-            </a:r>
-            <a:r>
-              <a:rPr lang="en-US" sz="2800" b="0" strike="noStrike" spc="-1" dirty="0">
-                <a:solidFill>
-                  <a:srgbClr val="000000"/>
-                </a:solidFill>
-                <a:latin typeface="Arial" panose="020B0604020202020204" pitchFamily="34" charset="0"/>
-                <a:ea typeface="ArialMT"/>
-                <a:cs typeface="Arial" panose="020B0604020202020204" pitchFamily="34" charset="0"/>
-              </a:rPr>
-              <a:t>, int </a:t>
-            </a:r>
-            <a:r>
-              <a:rPr lang="en-US" sz="2800" b="0" strike="noStrike" spc="-1" dirty="0" err="1">
-                <a:solidFill>
-                  <a:srgbClr val="000000"/>
-                </a:solidFill>
-                <a:latin typeface="Arial" panose="020B0604020202020204" pitchFamily="34" charset="0"/>
-                <a:ea typeface="ArialMT"/>
-                <a:cs typeface="Arial" panose="020B0604020202020204" pitchFamily="34" charset="0"/>
-              </a:rPr>
-              <a:t>second_val</a:t>
-            </a:r>
-            <a:r>
-              <a:rPr lang="en-US" sz="2800" b="0" strike="noStrike" spc="-1" dirty="0">
-                <a:solidFill>
-                  <a:srgbClr val="000000"/>
-                </a:solidFill>
-                <a:latin typeface="Arial" panose="020B0604020202020204" pitchFamily="34" charset="0"/>
-                <a:ea typeface="ArialMT"/>
-                <a:cs typeface="Arial" panose="020B0604020202020204" pitchFamily="34" charset="0"/>
-              </a:rPr>
-              <a:t>);</a:t>
-            </a:r>
-            <a:endParaRPr lang="en-US" sz="2800" spc="-1" dirty="0">
-              <a:solidFill>
-                <a:srgbClr val="000000"/>
-              </a:solidFill>
-              <a:latin typeface="Arial" panose="020B0604020202020204" pitchFamily="34" charset="0"/>
-              <a:ea typeface="ArialMT"/>
-              <a:cs typeface="Arial" panose="020B0604020202020204" pitchFamily="34" charset="0"/>
-            </a:endParaRPr>
-          </a:p>
-          <a:p>
-            <a:pPr>
-              <a:lnSpc>
-                <a:spcPct val="90000"/>
-              </a:lnSpc>
-              <a:spcBef>
-                <a:spcPts val="1001"/>
-              </a:spcBef>
-            </a:pPr>
-            <a:r>
-              <a:rPr lang="en-US" sz="2800" b="0" strike="noStrike" spc="-1" dirty="0" err="1">
-                <a:solidFill>
-                  <a:srgbClr val="000000"/>
-                </a:solidFill>
-                <a:latin typeface="Arial" panose="020B0604020202020204" pitchFamily="34" charset="0"/>
-                <a:cs typeface="Arial" panose="020B0604020202020204" pitchFamily="34" charset="0"/>
-                <a:hlinkClick r:id="rId2"/>
-              </a:rPr>
-              <a:t>Посмотреть</a:t>
-            </a:r>
-            <a:r>
-              <a:rPr lang="en-US" sz="2800" b="0" strike="noStrike" spc="-1" dirty="0">
-                <a:solidFill>
-                  <a:srgbClr val="000000"/>
-                </a:solidFill>
-                <a:latin typeface="Arial" panose="020B0604020202020204" pitchFamily="34" charset="0"/>
-                <a:cs typeface="Arial" panose="020B0604020202020204" pitchFamily="34" charset="0"/>
-                <a:hlinkClick r:id="rId2"/>
-              </a:rPr>
-              <a:t> </a:t>
-            </a:r>
-            <a:r>
-              <a:rPr lang="en-US" sz="2800" b="0" strike="noStrike" spc="-1" dirty="0" err="1">
-                <a:solidFill>
-                  <a:srgbClr val="000000"/>
-                </a:solidFill>
-                <a:latin typeface="Arial" panose="020B0604020202020204" pitchFamily="34" charset="0"/>
-                <a:cs typeface="Arial" panose="020B0604020202020204" pitchFamily="34" charset="0"/>
-                <a:hlinkClick r:id="rId2"/>
-              </a:rPr>
-              <a:t>можно</a:t>
-            </a:r>
-            <a:r>
-              <a:rPr lang="en-US" sz="2800" b="0" strike="noStrike" spc="-1" dirty="0">
-                <a:solidFill>
-                  <a:srgbClr val="000000"/>
-                </a:solidFill>
-                <a:latin typeface="Arial" panose="020B0604020202020204" pitchFamily="34" charset="0"/>
-                <a:cs typeface="Arial" panose="020B0604020202020204" pitchFamily="34" charset="0"/>
-                <a:hlinkClick r:id="rId2"/>
-              </a:rPr>
-              <a:t> </a:t>
-            </a:r>
-            <a:r>
-              <a:rPr lang="en-US" sz="2800" b="0" strike="noStrike" spc="-1" dirty="0" err="1">
-                <a:solidFill>
-                  <a:srgbClr val="000000"/>
-                </a:solidFill>
-                <a:latin typeface="Arial" panose="020B0604020202020204" pitchFamily="34" charset="0"/>
-                <a:cs typeface="Arial" panose="020B0604020202020204" pitchFamily="34" charset="0"/>
-                <a:hlinkClick r:id="rId2"/>
-              </a:rPr>
-              <a:t>тут</a:t>
             </a:r>
             <a:endParaRPr lang="en-US" sz="2800" b="0" strike="noStrike" spc="-1" dirty="0">
               <a:solidFill>
